--- a/presentation/UNanofabTools/serveraccess/slides/Server-Access.pptx
+++ b/presentation/UNanofabTools/serveraccess/slides/Server-Access.pptx
@@ -1838,7 +1838,7 @@
           <a:p>
             <a:r>
               <a:rPr lang="en-US" dirty="0"/>
-              <a:t>Introduce tmux at a high level: it's a 'saved terminal' — a window with a program running in it that keeps going even when nobody's logged in. The cleanroom server uses exactly two of them. The website is the one users see; the downloader is the data pipeline that keeps the website's machine pages fresh. Both must stay alive 24/7.</a:t>
+              <a:t>Introduce tmux at a high level: it's a 'saved terminal' — a window with a program running in it that keeps going even when nobody's logged in. The cleanroom server uses exactly two of them. The website is the one users see; the downloader is the data pipeline that keeps the website's machine pages fresh. Both must stay alive 24/7. **Update (2026-06-18):** these two services now run under user-level systemd (systemctl --user, auto-restart on failure, linger), so they survive crashes and reboots on their own. The tmux sessions remain a convenient way to watch live console output, and the detach hygiene below still matters for clean inspection — though an accidental exit no longer takes the website down the way it used to.</a:t>
             </a:r>
             <a:endParaRPr lang="en-US" dirty="0"/>
           </a:p>
